--- a/Output/Figures_paper/Figure_1_ppt_file/figure_1_procedure.pptx
+++ b/Output/Figures_paper/Figure_1_ppt_file/figure_1_procedure.pptx
@@ -10,7 +10,7 @@
   <p:sldIdLst>
     <p:sldId id="256" r:id="rId2"/>
   </p:sldIdLst>
-  <p:sldSz cx="18000663" cy="10799763"/>
+  <p:sldSz cx="6300788" cy="3314700"/>
   <p:notesSz cx="6858000" cy="9144000"/>
   <p:defaultTextStyle>
     <a:defPPr>
@@ -197,7 +197,7 @@
           <a:p>
             <a:fld id="{67227CE9-F2C4-7843-AC05-5A93B2B6AB55}" type="datetimeFigureOut">
               <a:rPr lang="en-US" smtClean="0"/>
-              <a:t>8/25/26</a:t>
+              <a:t>10/16/26</a:t>
             </a:fld>
             <a:endParaRPr lang="en-US"/>
           </a:p>
@@ -492,7 +492,12 @@
             <p:ph type="sldImg"/>
           </p:nvPr>
         </p:nvSpPr>
-        <p:spPr/>
+        <p:spPr>
+          <a:xfrm>
+            <a:off x="496888" y="1143000"/>
+            <a:ext cx="5864225" cy="3086100"/>
+          </a:xfrm>
+        </p:spPr>
         <p:txBody>
           <a:bodyPr/>
           <a:lstStyle/>
@@ -687,7 +692,7 @@
           <a:p>
             <a:fld id="{8274609C-FC08-D14D-89F9-41E221EC57E5}" type="datetimeFigureOut">
               <a:rPr lang="en-US" smtClean="0"/>
-              <a:t>8/25/26</a:t>
+              <a:t>10/16/26</a:t>
             </a:fld>
             <a:endParaRPr lang="en-US"/>
           </a:p>
@@ -857,7 +862,7 @@
           <a:p>
             <a:fld id="{8274609C-FC08-D14D-89F9-41E221EC57E5}" type="datetimeFigureOut">
               <a:rPr lang="en-US" smtClean="0"/>
-              <a:t>8/25/26</a:t>
+              <a:t>10/16/26</a:t>
             </a:fld>
             <a:endParaRPr lang="en-US"/>
           </a:p>
@@ -1037,7 +1042,7 @@
           <a:p>
             <a:fld id="{8274609C-FC08-D14D-89F9-41E221EC57E5}" type="datetimeFigureOut">
               <a:rPr lang="en-US" smtClean="0"/>
-              <a:t>8/25/26</a:t>
+              <a:t>10/16/26</a:t>
             </a:fld>
             <a:endParaRPr lang="en-US"/>
           </a:p>
@@ -1207,7 +1212,7 @@
           <a:p>
             <a:fld id="{8274609C-FC08-D14D-89F9-41E221EC57E5}" type="datetimeFigureOut">
               <a:rPr lang="en-US" smtClean="0"/>
-              <a:t>8/25/26</a:t>
+              <a:t>10/16/26</a:t>
             </a:fld>
             <a:endParaRPr lang="en-US"/>
           </a:p>
@@ -1453,7 +1458,7 @@
           <a:p>
             <a:fld id="{8274609C-FC08-D14D-89F9-41E221EC57E5}" type="datetimeFigureOut">
               <a:rPr lang="en-US" smtClean="0"/>
-              <a:t>8/25/26</a:t>
+              <a:t>10/16/26</a:t>
             </a:fld>
             <a:endParaRPr lang="en-US"/>
           </a:p>
@@ -1685,7 +1690,7 @@
           <a:p>
             <a:fld id="{8274609C-FC08-D14D-89F9-41E221EC57E5}" type="datetimeFigureOut">
               <a:rPr lang="en-US" smtClean="0"/>
-              <a:t>8/25/26</a:t>
+              <a:t>10/16/26</a:t>
             </a:fld>
             <a:endParaRPr lang="en-US"/>
           </a:p>
@@ -2052,7 +2057,7 @@
           <a:p>
             <a:fld id="{8274609C-FC08-D14D-89F9-41E221EC57E5}" type="datetimeFigureOut">
               <a:rPr lang="en-US" smtClean="0"/>
-              <a:t>8/25/26</a:t>
+              <a:t>10/16/26</a:t>
             </a:fld>
             <a:endParaRPr lang="en-US"/>
           </a:p>
@@ -2170,7 +2175,7 @@
           <a:p>
             <a:fld id="{8274609C-FC08-D14D-89F9-41E221EC57E5}" type="datetimeFigureOut">
               <a:rPr lang="en-US" smtClean="0"/>
-              <a:t>8/25/26</a:t>
+              <a:t>10/16/26</a:t>
             </a:fld>
             <a:endParaRPr lang="en-US"/>
           </a:p>
@@ -2265,7 +2270,7 @@
           <a:p>
             <a:fld id="{8274609C-FC08-D14D-89F9-41E221EC57E5}" type="datetimeFigureOut">
               <a:rPr lang="en-US" smtClean="0"/>
-              <a:t>8/25/26</a:t>
+              <a:t>10/16/26</a:t>
             </a:fld>
             <a:endParaRPr lang="en-US"/>
           </a:p>
@@ -2542,7 +2547,7 @@
           <a:p>
             <a:fld id="{8274609C-FC08-D14D-89F9-41E221EC57E5}" type="datetimeFigureOut">
               <a:rPr lang="en-US" smtClean="0"/>
-              <a:t>8/25/26</a:t>
+              <a:t>10/16/26</a:t>
             </a:fld>
             <a:endParaRPr lang="en-US"/>
           </a:p>
@@ -2799,7 +2804,7 @@
           <a:p>
             <a:fld id="{8274609C-FC08-D14D-89F9-41E221EC57E5}" type="datetimeFigureOut">
               <a:rPr lang="en-US" smtClean="0"/>
-              <a:t>8/25/26</a:t>
+              <a:t>10/16/26</a:t>
             </a:fld>
             <a:endParaRPr lang="en-US"/>
           </a:p>
@@ -3012,7 +3017,7 @@
           <a:p>
             <a:fld id="{8274609C-FC08-D14D-89F9-41E221EC57E5}" type="datetimeFigureOut">
               <a:rPr lang="en-US" smtClean="0"/>
-              <a:t>8/25/26</a:t>
+              <a:t>10/16/26</a:t>
             </a:fld>
             <a:endParaRPr lang="en-US"/>
           </a:p>
@@ -3431,14 +3436,14 @@
         </p:nvSpPr>
         <p:spPr>
           <a:xfrm>
-            <a:off x="1154856" y="3667660"/>
-            <a:ext cx="1640244" cy="850744"/>
+            <a:off x="631518" y="108000"/>
+            <a:ext cx="1656000" cy="631680"/>
           </a:xfrm>
           <a:prstGeom prst="roundRect">
             <a:avLst/>
           </a:prstGeom>
           <a:noFill/>
-          <a:ln w="19050">
+          <a:ln w="9525">
             <a:solidFill>
               <a:schemeClr val="tx1"/>
             </a:solidFill>
@@ -3463,7 +3468,7 @@
           <a:lstStyle/>
           <a:p>
             <a:pPr algn="ctr"/>
-            <a:endParaRPr lang="en-US" sz="1100" noProof="1">
+            <a:endParaRPr lang="en-US" sz="800" noProof="1">
               <a:latin typeface="Arial" panose="020B0604020202020204" pitchFamily="34" charset="0"/>
               <a:cs typeface="Arial" panose="020B0604020202020204" pitchFamily="34" charset="0"/>
             </a:endParaRPr>
@@ -3484,8 +3489,8 @@
         </p:nvSpPr>
         <p:spPr>
           <a:xfrm>
-            <a:off x="1181011" y="3718185"/>
-            <a:ext cx="1587934" cy="769441"/>
+            <a:off x="631518" y="210093"/>
+            <a:ext cx="1656000" cy="427494"/>
           </a:xfrm>
           <a:prstGeom prst="rect">
             <a:avLst/>
@@ -3493,13 +3498,13 @@
           <a:noFill/>
         </p:spPr>
         <p:txBody>
-          <a:bodyPr wrap="square" rtlCol="0">
+          <a:bodyPr wrap="square" lIns="54000" tIns="28800" rIns="54000" bIns="28800" rtlCol="0" anchor="ctr">
             <a:spAutoFit/>
           </a:bodyPr>
           <a:lstStyle/>
           <a:p>
             <a:r>
-              <a:rPr lang="en-US" sz="1100" b="1" noProof="1">
+              <a:rPr lang="en-US" sz="800" b="1" noProof="1">
                 <a:latin typeface="Arial" panose="020B0604020202020204" pitchFamily="34" charset="0"/>
                 <a:cs typeface="Arial" panose="020B0604020202020204" pitchFamily="34" charset="0"/>
               </a:rPr>
@@ -3509,7 +3514,7 @@
           <a:p>
             <a:pPr algn="just"/>
             <a:r>
-              <a:rPr lang="en-US" sz="1100" noProof="1">
+              <a:rPr lang="en-US" sz="800" noProof="1">
                 <a:latin typeface="Arial" panose="020B0604020202020204" pitchFamily="34" charset="0"/>
                 <a:cs typeface="Arial" panose="020B0604020202020204" pitchFamily="34" charset="0"/>
               </a:rPr>
@@ -3534,13 +3539,13 @@
         </p:nvCxnSpPr>
         <p:spPr>
           <a:xfrm>
-            <a:off x="2905037" y="4103014"/>
-            <a:ext cx="994539" cy="7428"/>
+            <a:off x="2287518" y="423840"/>
+            <a:ext cx="1262782" cy="0"/>
           </a:xfrm>
           <a:prstGeom prst="straightConnector1">
             <a:avLst/>
           </a:prstGeom>
-          <a:ln w="28575" cap="flat">
+          <a:ln w="12700" cap="flat">
             <a:round/>
             <a:tailEnd type="triangle" w="med" len="sm"/>
           </a:ln>
@@ -3574,8 +3579,8 @@
         </p:nvSpPr>
         <p:spPr>
           <a:xfrm>
-            <a:off x="4001657" y="3444777"/>
-            <a:ext cx="1675013" cy="1327317"/>
+            <a:off x="3636000" y="108000"/>
+            <a:ext cx="2556000" cy="626329"/>
           </a:xfrm>
           <a:prstGeom prst="roundRect">
             <a:avLst/>
@@ -3583,7 +3588,7 @@
           <a:solidFill>
             <a:schemeClr val="bg1"/>
           </a:solidFill>
-          <a:ln w="19050">
+          <a:ln w="9525">
             <a:solidFill>
               <a:schemeClr val="tx1"/>
             </a:solidFill>
@@ -3608,7 +3613,7 @@
           <a:lstStyle/>
           <a:p>
             <a:pPr algn="ctr"/>
-            <a:endParaRPr lang="en-US" sz="1100" noProof="1">
+            <a:endParaRPr lang="en-US" sz="800" noProof="1">
               <a:latin typeface="Arial" panose="020B0604020202020204" pitchFamily="34" charset="0"/>
               <a:cs typeface="Arial" panose="020B0604020202020204" pitchFamily="34" charset="0"/>
             </a:endParaRPr>
@@ -3629,8 +3634,8 @@
         </p:nvSpPr>
         <p:spPr>
           <a:xfrm>
-            <a:off x="4030583" y="3469798"/>
-            <a:ext cx="1675013" cy="1277273"/>
+            <a:off x="3636000" y="148537"/>
+            <a:ext cx="2556000" cy="550605"/>
           </a:xfrm>
           <a:prstGeom prst="rect">
             <a:avLst/>
@@ -3638,14 +3643,14 @@
           <a:noFill/>
         </p:spPr>
         <p:txBody>
-          <a:bodyPr wrap="square" rtlCol="0">
+          <a:bodyPr wrap="square" lIns="54000" tIns="28800" rIns="54000" bIns="28800" rtlCol="0" anchor="ctr">
             <a:spAutoFit/>
           </a:bodyPr>
           <a:lstStyle/>
           <a:p>
-            <a:pPr algn="just"/>
-            <a:r>
-              <a:rPr lang="en-US" sz="1100" b="1" noProof="1">
+            <a:pPr algn="l"/>
+            <a:r>
+              <a:rPr lang="en-US" sz="800" b="1" noProof="1">
                 <a:latin typeface="Arial" panose="020B0604020202020204" pitchFamily="34" charset="0"/>
                 <a:cs typeface="Arial" panose="020B0604020202020204" pitchFamily="34" charset="0"/>
               </a:rPr>
@@ -3655,7 +3660,7 @@
           <a:p>
             <a:pPr algn="just"/>
             <a:r>
-              <a:rPr lang="en-US" sz="1100" noProof="1">
+              <a:rPr lang="en-US" sz="800" noProof="1">
                 <a:latin typeface="Arial" panose="020B0604020202020204" pitchFamily="34" charset="0"/>
                 <a:cs typeface="Arial" panose="020B0604020202020204" pitchFamily="34" charset="0"/>
               </a:rPr>
@@ -3679,14 +3684,14 @@
           <p:nvPr>
             <p:extLst>
               <p:ext uri="{D42A27DB-BD31-4B8C-83A1-F6EECF244321}">
-                <p14:modId xmlns:p14="http://schemas.microsoft.com/office/powerpoint/2010/main" val="3714294248"/>
+                <p14:modId xmlns:p14="http://schemas.microsoft.com/office/powerpoint/2010/main" val="2142713692"/>
               </p:ext>
             </p:extLst>
           </p:nvPr>
         </p:nvGraphicFramePr>
         <p:xfrm>
-          <a:off x="6899629" y="3003535"/>
-          <a:ext cx="4959594" cy="1904406"/>
+          <a:off x="108000" y="1512151"/>
+          <a:ext cx="3330000" cy="1292160"/>
         </p:xfrm>
         <a:graphic>
           <a:graphicData uri="http://schemas.openxmlformats.org/drawingml/2006/table">
@@ -3698,28 +3703,28 @@
                 <a:tableStyleId>{5C22544A-7EE6-4342-B048-85BDC9FD1C3A}</a:tableStyleId>
               </a:tblPr>
               <a:tblGrid>
-                <a:gridCol w="1681653">
+                <a:gridCol w="1116000">
                   <a:extLst>
                     <a:ext uri="{9D8B030D-6E8A-4147-A177-3AD203B41FA5}">
                       <a16:colId xmlns:a16="http://schemas.microsoft.com/office/drawing/2014/main" val="2205331333"/>
                     </a:ext>
                   </a:extLst>
                 </a:gridCol>
-                <a:gridCol w="1092647">
+                <a:gridCol w="738000">
                   <a:extLst>
                     <a:ext uri="{9D8B030D-6E8A-4147-A177-3AD203B41FA5}">
                       <a16:colId xmlns:a16="http://schemas.microsoft.com/office/drawing/2014/main" val="1173343094"/>
                     </a:ext>
                   </a:extLst>
                 </a:gridCol>
-                <a:gridCol w="1092647">
+                <a:gridCol w="738000">
                   <a:extLst>
                     <a:ext uri="{9D8B030D-6E8A-4147-A177-3AD203B41FA5}">
                       <a16:colId xmlns:a16="http://schemas.microsoft.com/office/drawing/2014/main" val="3802599047"/>
                     </a:ext>
                   </a:extLst>
                 </a:gridCol>
-                <a:gridCol w="1092647">
+                <a:gridCol w="738000">
                   <a:extLst>
                     <a:ext uri="{9D8B030D-6E8A-4147-A177-3AD203B41FA5}">
                       <a16:colId xmlns:a16="http://schemas.microsoft.com/office/drawing/2014/main" val="599585777"/>
@@ -3727,7 +3732,7 @@
                   </a:extLst>
                 </a:gridCol>
               </a:tblGrid>
-              <a:tr h="304206">
+              <a:tr h="201120">
                 <a:tc>
                   <a:txBody>
                     <a:bodyPr/>
@@ -3735,7 +3740,7 @@
                     <a:p>
                       <a:pPr algn="ctr"/>
                       <a:r>
-                        <a:rPr lang="en-US" sz="1100" dirty="0">
+                        <a:rPr lang="en-US" sz="800" dirty="0">
                           <a:solidFill>
                             <a:schemeClr val="tx1"/>
                           </a:solidFill>
@@ -3746,8 +3751,8 @@
                       </a:r>
                     </a:p>
                   </a:txBody>
-                  <a:tcPr anchor="ctr">
-                    <a:lnL w="12700" cap="flat" cmpd="sng" algn="ctr">
+                  <a:tcPr marL="28800" marR="28800" marT="18000" marB="18000" anchor="ctr">
+                    <a:lnL w="6350" cap="flat" cmpd="sng" algn="ctr">
                       <a:solidFill>
                         <a:schemeClr val="tx1"/>
                       </a:solidFill>
@@ -3756,7 +3761,7 @@
                       <a:headEnd type="none" w="med" len="med"/>
                       <a:tailEnd type="none" w="med" len="med"/>
                     </a:lnL>
-                    <a:lnR w="12700" cap="flat" cmpd="sng" algn="ctr">
+                    <a:lnR w="6350" cap="flat" cmpd="sng" algn="ctr">
                       <a:solidFill>
                         <a:schemeClr val="tx1"/>
                       </a:solidFill>
@@ -3765,7 +3770,7 @@
                       <a:headEnd type="none" w="med" len="med"/>
                       <a:tailEnd type="none" w="med" len="med"/>
                     </a:lnR>
-                    <a:lnT w="12700" cap="flat" cmpd="sng" algn="ctr">
+                    <a:lnT w="6350" cap="flat" cmpd="sng" algn="ctr">
                       <a:solidFill>
                         <a:schemeClr val="tx1"/>
                       </a:solidFill>
@@ -3774,7 +3779,7 @@
                       <a:headEnd type="none" w="med" len="med"/>
                       <a:tailEnd type="none" w="med" len="med"/>
                     </a:lnT>
-                    <a:lnB w="12700" cap="flat" cmpd="sng" algn="ctr">
+                    <a:lnB w="6350" cap="flat" cmpd="sng" algn="ctr">
                       <a:solidFill>
                         <a:schemeClr val="tx1"/>
                       </a:solidFill>
@@ -3795,7 +3800,7 @@
                     <a:p>
                       <a:pPr algn="ctr"/>
                       <a:r>
-                        <a:rPr lang="en-US" sz="1100" dirty="0">
+                        <a:rPr lang="en-US" sz="800" dirty="0">
                           <a:solidFill>
                             <a:schemeClr val="tx1"/>
                           </a:solidFill>
@@ -3806,8 +3811,8 @@
                       </a:r>
                     </a:p>
                   </a:txBody>
-                  <a:tcPr marL="45720" marR="45720" anchor="ctr">
-                    <a:lnL w="12700" cap="flat" cmpd="sng" algn="ctr">
+                  <a:tcPr marL="28800" marR="28800" marT="18000" marB="18000" anchor="ctr">
+                    <a:lnL w="6350" cap="flat" cmpd="sng" algn="ctr">
                       <a:solidFill>
                         <a:schemeClr val="tx1"/>
                       </a:solidFill>
@@ -3816,7 +3821,7 @@
                       <a:headEnd type="none" w="med" len="med"/>
                       <a:tailEnd type="none" w="med" len="med"/>
                     </a:lnL>
-                    <a:lnR w="12700" cap="flat" cmpd="sng" algn="ctr">
+                    <a:lnR w="6350" cap="flat" cmpd="sng" algn="ctr">
                       <a:solidFill>
                         <a:schemeClr val="tx1"/>
                       </a:solidFill>
@@ -3825,7 +3830,7 @@
                       <a:headEnd type="none" w="med" len="med"/>
                       <a:tailEnd type="none" w="med" len="med"/>
                     </a:lnR>
-                    <a:lnT w="12700" cap="flat" cmpd="sng" algn="ctr">
+                    <a:lnT w="6350" cap="flat" cmpd="sng" algn="ctr">
                       <a:solidFill>
                         <a:schemeClr val="tx1"/>
                       </a:solidFill>
@@ -3834,7 +3839,7 @@
                       <a:headEnd type="none" w="med" len="med"/>
                       <a:tailEnd type="none" w="med" len="med"/>
                     </a:lnT>
-                    <a:lnB w="12700" cap="flat" cmpd="sng" algn="ctr">
+                    <a:lnB w="6350" cap="flat" cmpd="sng" algn="ctr">
                       <a:solidFill>
                         <a:schemeClr val="tx1"/>
                       </a:solidFill>
@@ -3855,7 +3860,7 @@
                     <a:p>
                       <a:pPr algn="ctr"/>
                       <a:r>
-                        <a:rPr lang="en-US" sz="1100" dirty="0">
+                        <a:rPr lang="en-US" sz="800" dirty="0">
                           <a:solidFill>
                             <a:schemeClr val="tx1"/>
                           </a:solidFill>
@@ -3866,8 +3871,8 @@
                       </a:r>
                     </a:p>
                   </a:txBody>
-                  <a:tcPr marL="45720" marR="45720" anchor="ctr">
-                    <a:lnL w="12700" cap="flat" cmpd="sng" algn="ctr">
+                  <a:tcPr marL="28800" marR="28800" marT="18000" marB="18000" anchor="ctr">
+                    <a:lnL w="6350" cap="flat" cmpd="sng" algn="ctr">
                       <a:solidFill>
                         <a:schemeClr val="tx1"/>
                       </a:solidFill>
@@ -3876,7 +3881,7 @@
                       <a:headEnd type="none" w="med" len="med"/>
                       <a:tailEnd type="none" w="med" len="med"/>
                     </a:lnL>
-                    <a:lnR w="12700" cap="flat" cmpd="sng" algn="ctr">
+                    <a:lnR w="6350" cap="flat" cmpd="sng" algn="ctr">
                       <a:solidFill>
                         <a:schemeClr val="tx1"/>
                       </a:solidFill>
@@ -3885,7 +3890,7 @@
                       <a:headEnd type="none" w="med" len="med"/>
                       <a:tailEnd type="none" w="med" len="med"/>
                     </a:lnR>
-                    <a:lnT w="12700" cap="flat" cmpd="sng" algn="ctr">
+                    <a:lnT w="6350" cap="flat" cmpd="sng" algn="ctr">
                       <a:solidFill>
                         <a:schemeClr val="tx1"/>
                       </a:solidFill>
@@ -3894,7 +3899,7 @@
                       <a:headEnd type="none" w="med" len="med"/>
                       <a:tailEnd type="none" w="med" len="med"/>
                     </a:lnT>
-                    <a:lnB w="12700" cap="flat" cmpd="sng" algn="ctr">
+                    <a:lnB w="6350" cap="flat" cmpd="sng" algn="ctr">
                       <a:solidFill>
                         <a:schemeClr val="tx1"/>
                       </a:solidFill>
@@ -3915,7 +3920,7 @@
                     <a:p>
                       <a:pPr algn="ctr"/>
                       <a:r>
-                        <a:rPr lang="en-US" sz="1100" dirty="0">
+                        <a:rPr lang="en-US" sz="800" dirty="0">
                           <a:solidFill>
                             <a:schemeClr val="tx1"/>
                           </a:solidFill>
@@ -3926,8 +3931,8 @@
                       </a:r>
                     </a:p>
                   </a:txBody>
-                  <a:tcPr anchor="ctr">
-                    <a:lnL w="12700" cap="flat" cmpd="sng" algn="ctr">
+                  <a:tcPr marL="28800" marR="28800" marT="18000" marB="18000" anchor="ctr">
+                    <a:lnL w="6350" cap="flat" cmpd="sng" algn="ctr">
                       <a:solidFill>
                         <a:schemeClr val="tx1"/>
                       </a:solidFill>
@@ -3936,7 +3941,7 @@
                       <a:headEnd type="none" w="med" len="med"/>
                       <a:tailEnd type="none" w="med" len="med"/>
                     </a:lnL>
-                    <a:lnR w="12700" cap="flat" cmpd="sng" algn="ctr">
+                    <a:lnR w="6350" cap="flat" cmpd="sng" algn="ctr">
                       <a:solidFill>
                         <a:schemeClr val="tx1"/>
                       </a:solidFill>
@@ -3945,7 +3950,7 @@
                       <a:headEnd type="none" w="med" len="med"/>
                       <a:tailEnd type="none" w="med" len="med"/>
                     </a:lnR>
-                    <a:lnT w="12700" cap="flat" cmpd="sng" algn="ctr">
+                    <a:lnT w="6350" cap="flat" cmpd="sng" algn="ctr">
                       <a:solidFill>
                         <a:schemeClr val="tx1"/>
                       </a:solidFill>
@@ -3954,7 +3959,7 @@
                       <a:headEnd type="none" w="med" len="med"/>
                       <a:tailEnd type="none" w="med" len="med"/>
                     </a:lnT>
-                    <a:lnB w="12700" cap="flat" cmpd="sng" algn="ctr">
+                    <a:lnB w="6350" cap="flat" cmpd="sng" algn="ctr">
                       <a:solidFill>
                         <a:schemeClr val="tx1"/>
                       </a:solidFill>
@@ -3974,7 +3979,7 @@
                   </a:ext>
                 </a:extLst>
               </a:tr>
-              <a:tr h="502920">
+              <a:tr h="323040">
                 <a:tc>
                   <a:txBody>
                     <a:bodyPr/>
@@ -3982,7 +3987,7 @@
                     <a:p>
                       <a:pPr algn="l"/>
                       <a:r>
-                        <a:rPr lang="en-US" sz="1100" noProof="1">
+                        <a:rPr lang="en-US" sz="800" noProof="1">
                           <a:solidFill>
                             <a:schemeClr val="tx1"/>
                           </a:solidFill>
@@ -3993,8 +3998,8 @@
                       </a:r>
                     </a:p>
                   </a:txBody>
-                  <a:tcPr anchor="ctr">
-                    <a:lnL w="12700" cap="flat" cmpd="sng" algn="ctr">
+                  <a:tcPr marL="28800" marR="28800" marT="18000" marB="18000" anchor="ctr">
+                    <a:lnL w="6350" cap="flat" cmpd="sng" algn="ctr">
                       <a:solidFill>
                         <a:schemeClr val="tx1"/>
                       </a:solidFill>
@@ -4003,7 +4008,7 @@
                       <a:headEnd type="none" w="med" len="med"/>
                       <a:tailEnd type="none" w="med" len="med"/>
                     </a:lnL>
-                    <a:lnR w="12700" cap="flat" cmpd="sng" algn="ctr">
+                    <a:lnR w="6350" cap="flat" cmpd="sng" algn="ctr">
                       <a:solidFill>
                         <a:schemeClr val="tx1"/>
                       </a:solidFill>
@@ -4012,7 +4017,7 @@
                       <a:headEnd type="none" w="med" len="med"/>
                       <a:tailEnd type="none" w="med" len="med"/>
                     </a:lnR>
-                    <a:lnT w="12700" cap="flat" cmpd="sng" algn="ctr">
+                    <a:lnT w="6350" cap="flat" cmpd="sng" algn="ctr">
                       <a:solidFill>
                         <a:schemeClr val="tx1"/>
                       </a:solidFill>
@@ -4021,7 +4026,7 @@
                       <a:headEnd type="none" w="med" len="med"/>
                       <a:tailEnd type="none" w="med" len="med"/>
                     </a:lnT>
-                    <a:lnB w="12700" cap="flat" cmpd="sng" algn="ctr">
+                    <a:lnB w="6350" cap="flat" cmpd="sng" algn="ctr">
                       <a:solidFill>
                         <a:schemeClr val="tx1"/>
                       </a:solidFill>
@@ -4042,7 +4047,7 @@
                     <a:p>
                       <a:pPr algn="ctr"/>
                       <a:r>
-                        <a:rPr lang="en-US" sz="1100" i="0" dirty="0">
+                        <a:rPr lang="en-US" sz="800" i="0" dirty="0">
                           <a:solidFill>
                             <a:schemeClr val="tx1"/>
                           </a:solidFill>
@@ -4053,8 +4058,8 @@
                       </a:r>
                     </a:p>
                   </a:txBody>
-                  <a:tcPr marL="45720" marR="45720" anchor="ctr">
-                    <a:lnL w="12700" cap="flat" cmpd="sng" algn="ctr">
+                  <a:tcPr marL="28800" marR="28800" marT="18000" marB="18000" anchor="ctr">
+                    <a:lnL w="6350" cap="flat" cmpd="sng" algn="ctr">
                       <a:solidFill>
                         <a:schemeClr val="tx1"/>
                       </a:solidFill>
@@ -4063,7 +4068,7 @@
                       <a:headEnd type="none" w="med" len="med"/>
                       <a:tailEnd type="none" w="med" len="med"/>
                     </a:lnL>
-                    <a:lnR w="12700" cap="flat" cmpd="sng" algn="ctr">
+                    <a:lnR w="6350" cap="flat" cmpd="sng" algn="ctr">
                       <a:solidFill>
                         <a:schemeClr val="tx1"/>
                       </a:solidFill>
@@ -4072,7 +4077,7 @@
                       <a:headEnd type="none" w="med" len="med"/>
                       <a:tailEnd type="none" w="med" len="med"/>
                     </a:lnR>
-                    <a:lnT w="12700" cap="flat" cmpd="sng" algn="ctr">
+                    <a:lnT w="6350" cap="flat" cmpd="sng" algn="ctr">
                       <a:solidFill>
                         <a:schemeClr val="tx1"/>
                       </a:solidFill>
@@ -4081,7 +4086,7 @@
                       <a:headEnd type="none" w="med" len="med"/>
                       <a:tailEnd type="none" w="med" len="med"/>
                     </a:lnT>
-                    <a:lnB w="12700" cap="flat" cmpd="sng" algn="ctr">
+                    <a:lnB w="6350" cap="flat" cmpd="sng" algn="ctr">
                       <a:solidFill>
                         <a:schemeClr val="tx1"/>
                       </a:solidFill>
@@ -4102,7 +4107,7 @@
                     <a:p>
                       <a:pPr algn="ctr"/>
                       <a:r>
-                        <a:rPr lang="en-US" sz="1100" i="0" dirty="0">
+                        <a:rPr lang="en-US" sz="800" i="0" dirty="0">
                           <a:solidFill>
                             <a:schemeClr val="tx1"/>
                           </a:solidFill>
@@ -4113,8 +4118,8 @@
                       </a:r>
                     </a:p>
                   </a:txBody>
-                  <a:tcPr marL="45720" marR="45720" anchor="ctr">
-                    <a:lnL w="12700" cap="flat" cmpd="sng" algn="ctr">
+                  <a:tcPr marL="28800" marR="28800" marT="18000" marB="18000" anchor="ctr">
+                    <a:lnL w="6350" cap="flat" cmpd="sng" algn="ctr">
                       <a:solidFill>
                         <a:schemeClr val="tx1"/>
                       </a:solidFill>
@@ -4123,7 +4128,7 @@
                       <a:headEnd type="none" w="med" len="med"/>
                       <a:tailEnd type="none" w="med" len="med"/>
                     </a:lnL>
-                    <a:lnR w="12700" cap="flat" cmpd="sng" algn="ctr">
+                    <a:lnR w="6350" cap="flat" cmpd="sng" algn="ctr">
                       <a:solidFill>
                         <a:schemeClr val="tx1"/>
                       </a:solidFill>
@@ -4132,7 +4137,7 @@
                       <a:headEnd type="none" w="med" len="med"/>
                       <a:tailEnd type="none" w="med" len="med"/>
                     </a:lnR>
-                    <a:lnT w="12700" cap="flat" cmpd="sng" algn="ctr">
+                    <a:lnT w="6350" cap="flat" cmpd="sng" algn="ctr">
                       <a:solidFill>
                         <a:schemeClr val="tx1"/>
                       </a:solidFill>
@@ -4141,7 +4146,7 @@
                       <a:headEnd type="none" w="med" len="med"/>
                       <a:tailEnd type="none" w="med" len="med"/>
                     </a:lnT>
-                    <a:lnB w="12700" cap="flat" cmpd="sng" algn="ctr">
+                    <a:lnB w="6350" cap="flat" cmpd="sng" algn="ctr">
                       <a:solidFill>
                         <a:schemeClr val="tx1"/>
                       </a:solidFill>
@@ -4162,7 +4167,7 @@
                     <a:p>
                       <a:pPr algn="ctr"/>
                       <a:r>
-                        <a:rPr lang="en-US" sz="1100" i="0" dirty="0">
+                        <a:rPr lang="en-US" sz="800" i="0" dirty="0">
                           <a:solidFill>
                             <a:schemeClr val="tx1"/>
                           </a:solidFill>
@@ -4173,8 +4178,8 @@
                       </a:r>
                     </a:p>
                   </a:txBody>
-                  <a:tcPr anchor="ctr">
-                    <a:lnL w="12700" cap="flat" cmpd="sng" algn="ctr">
+                  <a:tcPr marL="28800" marR="28800" marT="18000" marB="18000" anchor="ctr">
+                    <a:lnL w="6350" cap="flat" cmpd="sng" algn="ctr">
                       <a:solidFill>
                         <a:schemeClr val="tx1"/>
                       </a:solidFill>
@@ -4183,7 +4188,7 @@
                       <a:headEnd type="none" w="med" len="med"/>
                       <a:tailEnd type="none" w="med" len="med"/>
                     </a:lnL>
-                    <a:lnR w="12700" cap="flat" cmpd="sng" algn="ctr">
+                    <a:lnR w="6350" cap="flat" cmpd="sng" algn="ctr">
                       <a:solidFill>
                         <a:schemeClr val="tx1"/>
                       </a:solidFill>
@@ -4192,7 +4197,7 @@
                       <a:headEnd type="none" w="med" len="med"/>
                       <a:tailEnd type="none" w="med" len="med"/>
                     </a:lnR>
-                    <a:lnT w="12700" cap="flat" cmpd="sng" algn="ctr">
+                    <a:lnT w="6350" cap="flat" cmpd="sng" algn="ctr">
                       <a:solidFill>
                         <a:schemeClr val="tx1"/>
                       </a:solidFill>
@@ -4201,7 +4206,7 @@
                       <a:headEnd type="none" w="med" len="med"/>
                       <a:tailEnd type="none" w="med" len="med"/>
                     </a:lnT>
-                    <a:lnB w="12700" cap="flat" cmpd="sng" algn="ctr">
+                    <a:lnB w="6350" cap="flat" cmpd="sng" algn="ctr">
                       <a:solidFill>
                         <a:schemeClr val="tx1"/>
                       </a:solidFill>
@@ -4221,7 +4226,7 @@
                   </a:ext>
                 </a:extLst>
               </a:tr>
-              <a:tr h="502920">
+              <a:tr h="444960">
                 <a:tc>
                   <a:txBody>
                     <a:bodyPr/>
@@ -4229,7 +4234,7 @@
                     <a:p>
                       <a:pPr algn="l"/>
                       <a:r>
-                        <a:rPr lang="en-US" sz="1100" noProof="1">
+                        <a:rPr lang="en-US" sz="800" noProof="1">
                           <a:solidFill>
                             <a:schemeClr val="tx1"/>
                           </a:solidFill>
@@ -4240,8 +4245,8 @@
                       </a:r>
                     </a:p>
                   </a:txBody>
-                  <a:tcPr anchor="ctr">
-                    <a:lnL w="12700" cap="flat" cmpd="sng" algn="ctr">
+                  <a:tcPr marL="28800" marR="28800" marT="18000" marB="18000" anchor="ctr">
+                    <a:lnL w="6350" cap="flat" cmpd="sng" algn="ctr">
                       <a:solidFill>
                         <a:schemeClr val="tx1"/>
                       </a:solidFill>
@@ -4250,7 +4255,7 @@
                       <a:headEnd type="none" w="med" len="med"/>
                       <a:tailEnd type="none" w="med" len="med"/>
                     </a:lnL>
-                    <a:lnR w="12700" cap="flat" cmpd="sng" algn="ctr">
+                    <a:lnR w="6350" cap="flat" cmpd="sng" algn="ctr">
                       <a:solidFill>
                         <a:schemeClr val="tx1"/>
                       </a:solidFill>
@@ -4259,7 +4264,7 @@
                       <a:headEnd type="none" w="med" len="med"/>
                       <a:tailEnd type="none" w="med" len="med"/>
                     </a:lnR>
-                    <a:lnT w="12700" cap="flat" cmpd="sng" algn="ctr">
+                    <a:lnT w="6350" cap="flat" cmpd="sng" algn="ctr">
                       <a:solidFill>
                         <a:schemeClr val="tx1"/>
                       </a:solidFill>
@@ -4268,7 +4273,7 @@
                       <a:headEnd type="none" w="med" len="med"/>
                       <a:tailEnd type="none" w="med" len="med"/>
                     </a:lnT>
-                    <a:lnB w="12700" cap="flat" cmpd="sng" algn="ctr">
+                    <a:lnB w="6350" cap="flat" cmpd="sng" algn="ctr">
                       <a:solidFill>
                         <a:schemeClr val="tx1"/>
                       </a:solidFill>
@@ -4289,7 +4294,7 @@
                     <a:p>
                       <a:pPr algn="ctr"/>
                       <a:r>
-                        <a:rPr lang="en-US" sz="1100" i="0" dirty="0">
+                        <a:rPr lang="en-US" sz="800" i="0" dirty="0">
                           <a:solidFill>
                             <a:schemeClr val="tx1"/>
                           </a:solidFill>
@@ -4300,8 +4305,8 @@
                       </a:r>
                     </a:p>
                   </a:txBody>
-                  <a:tcPr marL="45720" marR="45720" anchor="ctr">
-                    <a:lnL w="12700" cap="flat" cmpd="sng" algn="ctr">
+                  <a:tcPr marL="28800" marR="28800" marT="18000" marB="18000" anchor="ctr">
+                    <a:lnL w="6350" cap="flat" cmpd="sng" algn="ctr">
                       <a:solidFill>
                         <a:schemeClr val="tx1"/>
                       </a:solidFill>
@@ -4310,7 +4315,7 @@
                       <a:headEnd type="none" w="med" len="med"/>
                       <a:tailEnd type="none" w="med" len="med"/>
                     </a:lnL>
-                    <a:lnR w="12700" cap="flat" cmpd="sng" algn="ctr">
+                    <a:lnR w="6350" cap="flat" cmpd="sng" algn="ctr">
                       <a:solidFill>
                         <a:schemeClr val="tx1"/>
                       </a:solidFill>
@@ -4319,7 +4324,7 @@
                       <a:headEnd type="none" w="med" len="med"/>
                       <a:tailEnd type="none" w="med" len="med"/>
                     </a:lnR>
-                    <a:lnT w="12700" cap="flat" cmpd="sng" algn="ctr">
+                    <a:lnT w="6350" cap="flat" cmpd="sng" algn="ctr">
                       <a:solidFill>
                         <a:schemeClr val="tx1"/>
                       </a:solidFill>
@@ -4328,7 +4333,7 @@
                       <a:headEnd type="none" w="med" len="med"/>
                       <a:tailEnd type="none" w="med" len="med"/>
                     </a:lnT>
-                    <a:lnB w="12700" cap="flat" cmpd="sng" algn="ctr">
+                    <a:lnB w="6350" cap="flat" cmpd="sng" algn="ctr">
                       <a:solidFill>
                         <a:schemeClr val="tx1"/>
                       </a:solidFill>
@@ -4349,7 +4354,7 @@
                     <a:p>
                       <a:pPr algn="ctr"/>
                       <a:r>
-                        <a:rPr lang="en-US" sz="1100" i="0" dirty="0">
+                        <a:rPr lang="en-US" sz="800" i="0" dirty="0">
                           <a:solidFill>
                             <a:schemeClr val="tx1"/>
                           </a:solidFill>
@@ -4360,8 +4365,8 @@
                       </a:r>
                     </a:p>
                   </a:txBody>
-                  <a:tcPr marL="45720" marR="45720" anchor="ctr">
-                    <a:lnL w="12700" cap="flat" cmpd="sng" algn="ctr">
+                  <a:tcPr marL="28800" marR="28800" marT="18000" marB="18000" anchor="ctr">
+                    <a:lnL w="6350" cap="flat" cmpd="sng" algn="ctr">
                       <a:solidFill>
                         <a:schemeClr val="tx1"/>
                       </a:solidFill>
@@ -4370,7 +4375,7 @@
                       <a:headEnd type="none" w="med" len="med"/>
                       <a:tailEnd type="none" w="med" len="med"/>
                     </a:lnL>
-                    <a:lnR w="12700" cap="flat" cmpd="sng" algn="ctr">
+                    <a:lnR w="6350" cap="flat" cmpd="sng" algn="ctr">
                       <a:solidFill>
                         <a:schemeClr val="tx1"/>
                       </a:solidFill>
@@ -4379,7 +4384,7 @@
                       <a:headEnd type="none" w="med" len="med"/>
                       <a:tailEnd type="none" w="med" len="med"/>
                     </a:lnR>
-                    <a:lnT w="12700" cap="flat" cmpd="sng" algn="ctr">
+                    <a:lnT w="6350" cap="flat" cmpd="sng" algn="ctr">
                       <a:solidFill>
                         <a:schemeClr val="tx1"/>
                       </a:solidFill>
@@ -4388,7 +4393,7 @@
                       <a:headEnd type="none" w="med" len="med"/>
                       <a:tailEnd type="none" w="med" len="med"/>
                     </a:lnT>
-                    <a:lnB w="12700" cap="flat" cmpd="sng" algn="ctr">
+                    <a:lnB w="6350" cap="flat" cmpd="sng" algn="ctr">
                       <a:solidFill>
                         <a:schemeClr val="tx1"/>
                       </a:solidFill>
@@ -4409,7 +4414,7 @@
                     <a:p>
                       <a:pPr algn="ctr"/>
                       <a:r>
-                        <a:rPr lang="en-US" sz="1100" i="0" dirty="0">
+                        <a:rPr lang="en-US" sz="800" i="0" dirty="0">
                           <a:solidFill>
                             <a:schemeClr val="tx1"/>
                           </a:solidFill>
@@ -4420,8 +4425,8 @@
                       </a:r>
                     </a:p>
                   </a:txBody>
-                  <a:tcPr anchor="ctr">
-                    <a:lnL w="12700" cap="flat" cmpd="sng" algn="ctr">
+                  <a:tcPr marL="28800" marR="28800" marT="18000" marB="18000" anchor="ctr">
+                    <a:lnL w="6350" cap="flat" cmpd="sng" algn="ctr">
                       <a:solidFill>
                         <a:schemeClr val="tx1"/>
                       </a:solidFill>
@@ -4430,7 +4435,7 @@
                       <a:headEnd type="none" w="med" len="med"/>
                       <a:tailEnd type="none" w="med" len="med"/>
                     </a:lnL>
-                    <a:lnR w="12700" cap="flat" cmpd="sng" algn="ctr">
+                    <a:lnR w="6350" cap="flat" cmpd="sng" algn="ctr">
                       <a:solidFill>
                         <a:schemeClr val="tx1"/>
                       </a:solidFill>
@@ -4439,7 +4444,7 @@
                       <a:headEnd type="none" w="med" len="med"/>
                       <a:tailEnd type="none" w="med" len="med"/>
                     </a:lnR>
-                    <a:lnT w="12700" cap="flat" cmpd="sng" algn="ctr">
+                    <a:lnT w="6350" cap="flat" cmpd="sng" algn="ctr">
                       <a:solidFill>
                         <a:schemeClr val="tx1"/>
                       </a:solidFill>
@@ -4448,7 +4453,7 @@
                       <a:headEnd type="none" w="med" len="med"/>
                       <a:tailEnd type="none" w="med" len="med"/>
                     </a:lnT>
-                    <a:lnB w="12700" cap="flat" cmpd="sng" algn="ctr">
+                    <a:lnB w="6350" cap="flat" cmpd="sng" algn="ctr">
                       <a:solidFill>
                         <a:schemeClr val="tx1"/>
                       </a:solidFill>
@@ -4468,7 +4473,7 @@
                   </a:ext>
                 </a:extLst>
               </a:tr>
-              <a:tr h="502920">
+              <a:tr h="323040">
                 <a:tc>
                   <a:txBody>
                     <a:bodyPr/>
@@ -4476,7 +4481,7 @@
                     <a:p>
                       <a:pPr algn="l"/>
                       <a:r>
-                        <a:rPr lang="en-US" sz="1100" noProof="1">
+                        <a:rPr lang="en-US" sz="800" noProof="1">
                           <a:solidFill>
                             <a:schemeClr val="tx1"/>
                           </a:solidFill>
@@ -4487,8 +4492,8 @@
                       </a:r>
                     </a:p>
                   </a:txBody>
-                  <a:tcPr anchor="ctr">
-                    <a:lnL w="12700" cap="flat" cmpd="sng" algn="ctr">
+                  <a:tcPr marL="28800" marR="28800" marT="18000" marB="18000" anchor="ctr">
+                    <a:lnL w="6350" cap="flat" cmpd="sng" algn="ctr">
                       <a:solidFill>
                         <a:schemeClr val="tx1"/>
                       </a:solidFill>
@@ -4497,7 +4502,7 @@
                       <a:headEnd type="none" w="med" len="med"/>
                       <a:tailEnd type="none" w="med" len="med"/>
                     </a:lnL>
-                    <a:lnR w="12700" cap="flat" cmpd="sng" algn="ctr">
+                    <a:lnR w="6350" cap="flat" cmpd="sng" algn="ctr">
                       <a:solidFill>
                         <a:schemeClr val="tx1"/>
                       </a:solidFill>
@@ -4506,7 +4511,7 @@
                       <a:headEnd type="none" w="med" len="med"/>
                       <a:tailEnd type="none" w="med" len="med"/>
                     </a:lnR>
-                    <a:lnT w="12700" cap="flat" cmpd="sng" algn="ctr">
+                    <a:lnT w="6350" cap="flat" cmpd="sng" algn="ctr">
                       <a:solidFill>
                         <a:schemeClr val="tx1"/>
                       </a:solidFill>
@@ -4515,7 +4520,7 @@
                       <a:headEnd type="none" w="med" len="med"/>
                       <a:tailEnd type="none" w="med" len="med"/>
                     </a:lnT>
-                    <a:lnB w="12700" cap="flat" cmpd="sng" algn="ctr">
+                    <a:lnB w="6350" cap="flat" cmpd="sng" algn="ctr">
                       <a:solidFill>
                         <a:schemeClr val="tx1"/>
                       </a:solidFill>
@@ -4536,7 +4541,7 @@
                     <a:p>
                       <a:pPr algn="ctr"/>
                       <a:r>
-                        <a:rPr lang="en-US" sz="1100" i="0" dirty="0">
+                        <a:rPr lang="en-US" sz="800" i="0" dirty="0">
                           <a:solidFill>
                             <a:schemeClr val="tx1"/>
                           </a:solidFill>
@@ -4547,8 +4552,8 @@
                       </a:r>
                     </a:p>
                   </a:txBody>
-                  <a:tcPr marL="45720" marR="45720" anchor="ctr">
-                    <a:lnL w="12700" cap="flat" cmpd="sng" algn="ctr">
+                  <a:tcPr marL="28800" marR="28800" marT="18000" marB="18000" anchor="ctr">
+                    <a:lnL w="6350" cap="flat" cmpd="sng" algn="ctr">
                       <a:solidFill>
                         <a:schemeClr val="tx1"/>
                       </a:solidFill>
@@ -4557,7 +4562,7 @@
                       <a:headEnd type="none" w="med" len="med"/>
                       <a:tailEnd type="none" w="med" len="med"/>
                     </a:lnL>
-                    <a:lnR w="12700" cap="flat" cmpd="sng" algn="ctr">
+                    <a:lnR w="6350" cap="flat" cmpd="sng" algn="ctr">
                       <a:solidFill>
                         <a:schemeClr val="tx1"/>
                       </a:solidFill>
@@ -4566,7 +4571,7 @@
                       <a:headEnd type="none" w="med" len="med"/>
                       <a:tailEnd type="none" w="med" len="med"/>
                     </a:lnR>
-                    <a:lnT w="12700" cap="flat" cmpd="sng" algn="ctr">
+                    <a:lnT w="6350" cap="flat" cmpd="sng" algn="ctr">
                       <a:solidFill>
                         <a:schemeClr val="tx1"/>
                       </a:solidFill>
@@ -4575,7 +4580,7 @@
                       <a:headEnd type="none" w="med" len="med"/>
                       <a:tailEnd type="none" w="med" len="med"/>
                     </a:lnT>
-                    <a:lnB w="12700" cap="flat" cmpd="sng" algn="ctr">
+                    <a:lnB w="6350" cap="flat" cmpd="sng" algn="ctr">
                       <a:solidFill>
                         <a:schemeClr val="tx1"/>
                       </a:solidFill>
@@ -4596,7 +4601,7 @@
                     <a:p>
                       <a:pPr algn="ctr"/>
                       <a:r>
-                        <a:rPr lang="en-US" sz="1100" i="0" dirty="0">
+                        <a:rPr lang="en-US" sz="800" i="0" dirty="0">
                           <a:solidFill>
                             <a:schemeClr val="tx1"/>
                           </a:solidFill>
@@ -4607,8 +4612,8 @@
                       </a:r>
                     </a:p>
                   </a:txBody>
-                  <a:tcPr marL="45720" marR="45720" anchor="ctr">
-                    <a:lnL w="12700" cap="flat" cmpd="sng" algn="ctr">
+                  <a:tcPr marL="28800" marR="28800" marT="18000" marB="18000" anchor="ctr">
+                    <a:lnL w="6350" cap="flat" cmpd="sng" algn="ctr">
                       <a:solidFill>
                         <a:schemeClr val="tx1"/>
                       </a:solidFill>
@@ -4617,7 +4622,7 @@
                       <a:headEnd type="none" w="med" len="med"/>
                       <a:tailEnd type="none" w="med" len="med"/>
                     </a:lnL>
-                    <a:lnR w="12700" cap="flat" cmpd="sng" algn="ctr">
+                    <a:lnR w="6350" cap="flat" cmpd="sng" algn="ctr">
                       <a:solidFill>
                         <a:schemeClr val="tx1"/>
                       </a:solidFill>
@@ -4626,7 +4631,7 @@
                       <a:headEnd type="none" w="med" len="med"/>
                       <a:tailEnd type="none" w="med" len="med"/>
                     </a:lnR>
-                    <a:lnT w="12700" cap="flat" cmpd="sng" algn="ctr">
+                    <a:lnT w="6350" cap="flat" cmpd="sng" algn="ctr">
                       <a:solidFill>
                         <a:schemeClr val="tx1"/>
                       </a:solidFill>
@@ -4635,7 +4640,7 @@
                       <a:headEnd type="none" w="med" len="med"/>
                       <a:tailEnd type="none" w="med" len="med"/>
                     </a:lnT>
-                    <a:lnB w="12700" cap="flat" cmpd="sng" algn="ctr">
+                    <a:lnB w="6350" cap="flat" cmpd="sng" algn="ctr">
                       <a:solidFill>
                         <a:schemeClr val="tx1"/>
                       </a:solidFill>
@@ -4656,7 +4661,7 @@
                     <a:p>
                       <a:pPr algn="ctr"/>
                       <a:r>
-                        <a:rPr lang="en-US" sz="1100" i="0" dirty="0">
+                        <a:rPr lang="en-US" sz="800" i="0" dirty="0">
                           <a:solidFill>
                             <a:schemeClr val="tx1"/>
                           </a:solidFill>
@@ -4667,8 +4672,8 @@
                       </a:r>
                     </a:p>
                   </a:txBody>
-                  <a:tcPr anchor="ctr">
-                    <a:lnL w="12700" cap="flat" cmpd="sng" algn="ctr">
+                  <a:tcPr marL="28800" marR="28800" marT="18000" marB="18000" anchor="ctr">
+                    <a:lnL w="6350" cap="flat" cmpd="sng" algn="ctr">
                       <a:solidFill>
                         <a:schemeClr val="tx1"/>
                       </a:solidFill>
@@ -4677,7 +4682,7 @@
                       <a:headEnd type="none" w="med" len="med"/>
                       <a:tailEnd type="none" w="med" len="med"/>
                     </a:lnL>
-                    <a:lnR w="12700" cap="flat" cmpd="sng" algn="ctr">
+                    <a:lnR w="6350" cap="flat" cmpd="sng" algn="ctr">
                       <a:solidFill>
                         <a:schemeClr val="tx1"/>
                       </a:solidFill>
@@ -4686,7 +4691,7 @@
                       <a:headEnd type="none" w="med" len="med"/>
                       <a:tailEnd type="none" w="med" len="med"/>
                     </a:lnR>
-                    <a:lnT w="12700" cap="flat" cmpd="sng" algn="ctr">
+                    <a:lnT w="6350" cap="flat" cmpd="sng" algn="ctr">
                       <a:solidFill>
                         <a:schemeClr val="tx1"/>
                       </a:solidFill>
@@ -4695,7 +4700,7 @@
                       <a:headEnd type="none" w="med" len="med"/>
                       <a:tailEnd type="none" w="med" len="med"/>
                     </a:lnT>
-                    <a:lnB w="12700" cap="flat" cmpd="sng" algn="ctr">
+                    <a:lnB w="6350" cap="flat" cmpd="sng" algn="ctr">
                       <a:solidFill>
                         <a:schemeClr val="tx1"/>
                       </a:solidFill>
@@ -4733,8 +4738,8 @@
         </p:nvSpPr>
         <p:spPr>
           <a:xfrm>
-            <a:off x="2827227" y="3620232"/>
-            <a:ext cx="1152449" cy="430887"/>
+            <a:off x="2543455" y="18000"/>
+            <a:ext cx="750908" cy="380640"/>
           </a:xfrm>
           <a:prstGeom prst="rect">
             <a:avLst/>
@@ -4742,27 +4747,27 @@
           <a:noFill/>
         </p:spPr>
         <p:txBody>
-          <a:bodyPr wrap="square" rtlCol="0">
-            <a:spAutoFit/>
+          <a:bodyPr wrap="square" lIns="0" tIns="28800" rIns="0" bIns="28800" rtlCol="0" anchor="b">
+            <a:noAutofit/>
           </a:bodyPr>
           <a:lstStyle/>
           <a:p>
             <a:pPr algn="ctr"/>
             <a:r>
-              <a:rPr lang="en-US" sz="1100" i="1" noProof="1">
+              <a:rPr lang="en-US" sz="800" i="1" noProof="1">
                 <a:latin typeface="Arial" panose="020B0604020202020204" pitchFamily="34" charset="0"/>
                 <a:cs typeface="Arial" panose="020B0604020202020204" pitchFamily="34" charset="0"/>
               </a:rPr>
-              <a:t>Speech-to-text</a:t>
+              <a:t>Speech-to-text </a:t>
             </a:r>
             <a:br>
-              <a:rPr lang="en-US" sz="1100" i="1" noProof="1">
+              <a:rPr lang="en-US" sz="800" i="1" noProof="1">
                 <a:latin typeface="Arial" panose="020B0604020202020204" pitchFamily="34" charset="0"/>
                 <a:cs typeface="Arial" panose="020B0604020202020204" pitchFamily="34" charset="0"/>
               </a:rPr>
             </a:br>
             <a:r>
-              <a:rPr lang="en-US" sz="1100" i="1" noProof="1">
+              <a:rPr lang="en-US" sz="800" i="1" noProof="1">
                 <a:latin typeface="Arial" panose="020B0604020202020204" pitchFamily="34" charset="0"/>
                 <a:cs typeface="Arial" panose="020B0604020202020204" pitchFamily="34" charset="0"/>
               </a:rPr>
@@ -4785,8 +4790,8 @@
         </p:nvSpPr>
         <p:spPr>
           <a:xfrm>
-            <a:off x="5743289" y="3620232"/>
-            <a:ext cx="1053097" cy="430887"/>
+            <a:off x="2678918" y="935668"/>
+            <a:ext cx="1329164" cy="179520"/>
           </a:xfrm>
           <a:prstGeom prst="rect">
             <a:avLst/>
@@ -4794,28 +4799,18 @@
           <a:noFill/>
         </p:spPr>
         <p:txBody>
-          <a:bodyPr wrap="square" rtlCol="0">
+          <a:bodyPr wrap="square" lIns="18000" tIns="28800" rIns="18000" bIns="28800" rtlCol="0">
             <a:spAutoFit/>
           </a:bodyPr>
           <a:lstStyle/>
           <a:p>
-            <a:pPr algn="ctr"/>
-            <a:r>
-              <a:rPr lang="en-US" sz="1100" i="1" noProof="1">
+            <a:pPr algn="l"/>
+            <a:r>
+              <a:rPr lang="en-US" sz="800" i="1" noProof="1">
                 <a:latin typeface="Arial" panose="020B0604020202020204" pitchFamily="34" charset="0"/>
                 <a:cs typeface="Arial" panose="020B0604020202020204" pitchFamily="34" charset="0"/>
               </a:rPr>
-              <a:t>LLM chunking</a:t>
-            </a:r>
-          </a:p>
-          <a:p>
-            <a:pPr algn="ctr"/>
-            <a:r>
-              <a:rPr lang="en-US" sz="1100" i="1" noProof="1">
-                <a:latin typeface="Arial" panose="020B0604020202020204" pitchFamily="34" charset="0"/>
-                <a:cs typeface="Arial" panose="020B0604020202020204" pitchFamily="34" charset="0"/>
-              </a:rPr>
-              <a:t>and scoring</a:t>
+              <a:t>LLM chunking and scoring</a:t>
             </a:r>
           </a:p>
         </p:txBody>
@@ -4834,8 +4829,8 @@
         </p:nvSpPr>
         <p:spPr>
           <a:xfrm>
-            <a:off x="12017712" y="3620232"/>
-            <a:ext cx="787449" cy="430887"/>
+            <a:off x="3550300" y="1792946"/>
+            <a:ext cx="630000" cy="301440"/>
           </a:xfrm>
           <a:prstGeom prst="rect">
             <a:avLst/>
@@ -4843,14 +4838,14 @@
           <a:noFill/>
         </p:spPr>
         <p:txBody>
-          <a:bodyPr wrap="square" rtlCol="0">
+          <a:bodyPr wrap="square" lIns="0" tIns="28800" rIns="0" bIns="28800" rtlCol="0">
             <a:spAutoFit/>
           </a:bodyPr>
           <a:lstStyle/>
           <a:p>
             <a:pPr algn="ctr"/>
             <a:r>
-              <a:rPr lang="en-US" sz="1100" i="1" noProof="1">
+              <a:rPr lang="en-US" sz="800" i="1" noProof="1">
                 <a:latin typeface="Arial" panose="020B0604020202020204" pitchFamily="34" charset="0"/>
                 <a:cs typeface="Arial" panose="020B0604020202020204" pitchFamily="34" charset="0"/>
               </a:rPr>
@@ -4888,56 +4883,14 @@
         </p:blipFill>
         <p:spPr>
           <a:xfrm>
-            <a:off x="8645118" y="5456657"/>
-            <a:ext cx="1468616" cy="1160359"/>
+            <a:off x="1485000" y="3176343"/>
+            <a:ext cx="576000" cy="454588"/>
           </a:xfrm>
           <a:prstGeom prst="rect">
             <a:avLst/>
           </a:prstGeom>
         </p:spPr>
       </p:pic>
-      <p:cxnSp>
-        <p:nvCxnSpPr>
-          <p:cNvPr id="33" name="Connecteur droit avec flèche 32">
-            <a:extLst>
-              <a:ext uri="{FF2B5EF4-FFF2-40B4-BE49-F238E27FC236}">
-                <a16:creationId xmlns:a16="http://schemas.microsoft.com/office/drawing/2014/main" id="{EE879198-5FE3-5B16-68ED-A4BBDBD841E9}"/>
-              </a:ext>
-            </a:extLst>
-          </p:cNvPr>
-          <p:cNvCxnSpPr>
-            <a:cxnSpLocks/>
-          </p:cNvCxnSpPr>
-          <p:nvPr/>
-        </p:nvCxnSpPr>
-        <p:spPr>
-          <a:xfrm rot="16200000">
-            <a:off x="9053567" y="5580433"/>
-            <a:ext cx="651719" cy="7428"/>
-          </a:xfrm>
-          <a:prstGeom prst="straightConnector1">
-            <a:avLst/>
-          </a:prstGeom>
-          <a:ln w="28575" cap="flat">
-            <a:round/>
-            <a:tailEnd type="arrow" w="med" len="sm"/>
-          </a:ln>
-        </p:spPr>
-        <p:style>
-          <a:lnRef idx="2">
-            <a:schemeClr val="dk1"/>
-          </a:lnRef>
-          <a:fillRef idx="0">
-            <a:schemeClr val="dk1"/>
-          </a:fillRef>
-          <a:effectRef idx="1">
-            <a:schemeClr val="dk1"/>
-          </a:effectRef>
-          <a:fontRef idx="minor">
-            <a:schemeClr val="tx1"/>
-          </a:fontRef>
-        </p:style>
-      </p:cxnSp>
       <p:sp>
         <p:nvSpPr>
           <p:cNvPr id="37" name="ZoneTexte 36">
@@ -4952,8 +4905,8 @@
         </p:nvSpPr>
         <p:spPr>
           <a:xfrm>
-            <a:off x="9613375" y="5260980"/>
-            <a:ext cx="851416" cy="430887"/>
+            <a:off x="1826612" y="3042551"/>
+            <a:ext cx="891844" cy="179520"/>
           </a:xfrm>
           <a:prstGeom prst="rect">
             <a:avLst/>
@@ -4961,14 +4914,14 @@
           <a:noFill/>
         </p:spPr>
         <p:txBody>
-          <a:bodyPr wrap="square" rtlCol="0">
+          <a:bodyPr wrap="square" lIns="18000" tIns="28800" rIns="18000" bIns="28800" rtlCol="0">
             <a:spAutoFit/>
           </a:bodyPr>
           <a:lstStyle/>
           <a:p>
-            <a:pPr algn="ctr"/>
-            <a:r>
-              <a:rPr lang="en-US" sz="1100" i="1" noProof="1">
+            <a:pPr algn="l"/>
+            <a:r>
+              <a:rPr lang="en-US" sz="800" i="1" noProof="1">
                 <a:latin typeface="Arial" panose="020B0604020202020204" pitchFamily="34" charset="0"/>
                 <a:cs typeface="Arial" panose="020B0604020202020204" pitchFamily="34" charset="0"/>
               </a:rPr>
@@ -4993,13 +4946,13 @@
         </p:nvCxnSpPr>
         <p:spPr>
           <a:xfrm>
-            <a:off x="5801847" y="4101007"/>
-            <a:ext cx="994539" cy="7428"/>
+            <a:off x="1773000" y="1140118"/>
+            <a:ext cx="0" cy="305910"/>
           </a:xfrm>
           <a:prstGeom prst="straightConnector1">
             <a:avLst/>
           </a:prstGeom>
-          <a:ln w="28575" cap="flat">
+          <a:ln w="12700" cap="flat">
             <a:round/>
             <a:tailEnd type="triangle" w="med" len="sm"/>
           </a:ln>
@@ -5035,13 +4988,13 @@
         </p:nvCxnSpPr>
         <p:spPr>
           <a:xfrm>
-            <a:off x="11987330" y="4104721"/>
-            <a:ext cx="900000" cy="7428"/>
+            <a:off x="3438000" y="2158231"/>
+            <a:ext cx="854600" cy="0"/>
           </a:xfrm>
           <a:prstGeom prst="straightConnector1">
             <a:avLst/>
           </a:prstGeom>
-          <a:ln w="28575" cap="flat">
+          <a:ln w="12700" cap="flat">
             <a:round/>
             <a:tailEnd type="triangle" w="med" len="sm"/>
           </a:ln>
@@ -5084,8 +5037,8 @@
         </p:blipFill>
         <p:spPr>
           <a:xfrm>
-            <a:off x="12873233" y="2634596"/>
-            <a:ext cx="3450258" cy="2947678"/>
+            <a:off x="4337728" y="1341458"/>
+            <a:ext cx="1711116" cy="1462844"/>
           </a:xfrm>
           <a:prstGeom prst="rect">
             <a:avLst/>
@@ -5106,8 +5059,8 @@
         </p:nvSpPr>
         <p:spPr>
           <a:xfrm>
-            <a:off x="14172654" y="5594306"/>
-            <a:ext cx="851416" cy="261610"/>
+            <a:off x="4211926" y="2858061"/>
+            <a:ext cx="1962720" cy="179520"/>
           </a:xfrm>
           <a:prstGeom prst="rect">
             <a:avLst/>
@@ -5115,14 +5068,14 @@
           <a:noFill/>
         </p:spPr>
         <p:txBody>
-          <a:bodyPr wrap="square" rtlCol="0">
+          <a:bodyPr wrap="square" lIns="0" tIns="28800" rIns="0" bIns="28800" rtlCol="0">
             <a:spAutoFit/>
           </a:bodyPr>
           <a:lstStyle/>
           <a:p>
             <a:pPr algn="ctr"/>
             <a:r>
-              <a:rPr lang="en-US" sz="1100" noProof="1">
+              <a:rPr lang="en-US" sz="800" noProof="1">
                 <a:latin typeface="Arial" panose="020B0604020202020204" pitchFamily="34" charset="0"/>
                 <a:cs typeface="Arial" panose="020B0604020202020204" pitchFamily="34" charset="0"/>
               </a:rPr>
@@ -5159,8 +5112,8 @@
         </p:blipFill>
         <p:spPr>
           <a:xfrm>
-            <a:off x="1066922" y="2436811"/>
-            <a:ext cx="1250596" cy="1250596"/>
+            <a:off x="1099518" y="-530893"/>
+            <a:ext cx="720000" cy="720000"/>
           </a:xfrm>
           <a:prstGeom prst="rect">
             <a:avLst/>
@@ -5181,8 +5134,8 @@
         </p:nvGrpSpPr>
         <p:grpSpPr>
           <a:xfrm flipH="1">
-            <a:off x="2203450" y="2732272"/>
-            <a:ext cx="542632" cy="477678"/>
+            <a:off x="1805967" y="-269292"/>
+            <a:ext cx="198000" cy="174397"/>
             <a:chOff x="2225213" y="2602981"/>
             <a:chExt cx="542632" cy="477678"/>
           </a:xfrm>
@@ -6622,7 +6575,7 @@
             <a:bodyPr/>
             <a:lstStyle/>
             <a:p>
-              <a:endParaRPr lang="en-US" sz="1100" noProof="1">
+              <a:endParaRPr lang="en-US" sz="800" noProof="1">
                 <a:latin typeface="Arial" panose="020B0604020202020204" pitchFamily="34" charset="0"/>
                 <a:cs typeface="Arial" panose="020B0604020202020204" pitchFamily="34" charset="0"/>
               </a:endParaRPr>
@@ -6662,7 +6615,7 @@
             <a:bodyPr/>
             <a:lstStyle/>
             <a:p>
-              <a:endParaRPr lang="en-US" sz="1100" noProof="1">
+              <a:endParaRPr lang="en-US" sz="800" noProof="1">
                 <a:latin typeface="Arial" panose="020B0604020202020204" pitchFamily="34" charset="0"/>
                 <a:cs typeface="Arial" panose="020B0604020202020204" pitchFamily="34" charset="0"/>
               </a:endParaRPr>
@@ -6702,7 +6655,7 @@
             <a:bodyPr/>
             <a:lstStyle/>
             <a:p>
-              <a:endParaRPr lang="en-US" sz="1100" noProof="1">
+              <a:endParaRPr lang="en-US" sz="800" noProof="1">
                 <a:latin typeface="Arial" panose="020B0604020202020204" pitchFamily="34" charset="0"/>
                 <a:cs typeface="Arial" panose="020B0604020202020204" pitchFamily="34" charset="0"/>
               </a:endParaRPr>
@@ -6742,7 +6695,7 @@
             <a:bodyPr/>
             <a:lstStyle/>
             <a:p>
-              <a:endParaRPr lang="en-US" sz="1100" noProof="1">
+              <a:endParaRPr lang="en-US" sz="800" noProof="1">
                 <a:latin typeface="Arial" panose="020B0604020202020204" pitchFamily="34" charset="0"/>
                 <a:cs typeface="Arial" panose="020B0604020202020204" pitchFamily="34" charset="0"/>
               </a:endParaRPr>
@@ -6750,6 +6703,119 @@
           </p:txBody>
         </p:sp>
       </p:grpSp>
+      <p:cxnSp>
+        <p:nvCxnSpPr>
+          <p:cNvPr id="49" name="Elbow 1"/>
+          <p:cNvCxnSpPr>
+            <a:cxnSpLocks/>
+            <a:stCxn id="16" idx="2"/>
+          </p:cNvCxnSpPr>
+          <p:nvPr/>
+        </p:nvCxnSpPr>
+        <p:spPr>
+          <a:xfrm>
+            <a:off x="4914000" y="734329"/>
+            <a:ext cx="0" cy="405789"/>
+          </a:xfrm>
+          <a:prstGeom prst="straightConnector1">
+            <a:avLst/>
+          </a:prstGeom>
+          <a:ln w="12700" cap="flat">
+            <a:round/>
+          </a:ln>
+        </p:spPr>
+        <p:style>
+          <a:lnRef idx="2">
+            <a:schemeClr val="dk1"/>
+          </a:lnRef>
+          <a:fillRef idx="0">
+            <a:schemeClr val="dk1"/>
+          </a:fillRef>
+          <a:effectRef idx="1">
+            <a:schemeClr val="dk1"/>
+          </a:effectRef>
+          <a:fontRef idx="minor">
+            <a:schemeClr val="tx1"/>
+          </a:fontRef>
+        </p:style>
+      </p:cxnSp>
+      <p:cxnSp>
+        <p:nvCxnSpPr>
+          <p:cNvPr id="50" name="Elbow 2"/>
+          <p:cNvCxnSpPr>
+            <a:cxnSpLocks/>
+          </p:cNvCxnSpPr>
+          <p:nvPr/>
+        </p:nvCxnSpPr>
+        <p:spPr>
+          <a:xfrm>
+            <a:off x="1773000" y="1140118"/>
+            <a:ext cx="3141000" cy="0"/>
+          </a:xfrm>
+          <a:prstGeom prst="straightConnector1">
+            <a:avLst/>
+          </a:prstGeom>
+          <a:ln w="12700" cap="flat">
+            <a:round/>
+          </a:ln>
+        </p:spPr>
+        <p:style>
+          <a:lnRef idx="2">
+            <a:schemeClr val="dk1"/>
+          </a:lnRef>
+          <a:fillRef idx="0">
+            <a:schemeClr val="dk1"/>
+          </a:fillRef>
+          <a:effectRef idx="1">
+            <a:schemeClr val="dk1"/>
+          </a:effectRef>
+          <a:fontRef idx="minor">
+            <a:schemeClr val="tx1"/>
+          </a:fontRef>
+        </p:style>
+      </p:cxnSp>
+      <p:cxnSp>
+        <p:nvCxnSpPr>
+          <p:cNvPr id="27" name="Connecteur droit avec flèche 26">
+            <a:extLst>
+              <a:ext uri="{FF2B5EF4-FFF2-40B4-BE49-F238E27FC236}">
+                <a16:creationId xmlns:a16="http://schemas.microsoft.com/office/drawing/2014/main" id="{A88431A4-DEE0-9523-0610-BFD2B0E46705}"/>
+              </a:ext>
+            </a:extLst>
+          </p:cNvPr>
+          <p:cNvCxnSpPr>
+            <a:cxnSpLocks/>
+          </p:cNvCxnSpPr>
+          <p:nvPr/>
+        </p:nvCxnSpPr>
+        <p:spPr>
+          <a:xfrm flipV="1">
+            <a:off x="1773000" y="2858061"/>
+            <a:ext cx="2157" cy="456639"/>
+          </a:xfrm>
+          <a:prstGeom prst="straightConnector1">
+            <a:avLst/>
+          </a:prstGeom>
+          <a:ln w="12700" cap="flat">
+            <a:round/>
+            <a:tailEnd type="triangle" w="med" len="sm"/>
+          </a:ln>
+        </p:spPr>
+        <p:style>
+          <a:lnRef idx="2">
+            <a:schemeClr val="dk1"/>
+          </a:lnRef>
+          <a:fillRef idx="0">
+            <a:schemeClr val="dk1"/>
+          </a:fillRef>
+          <a:effectRef idx="1">
+            <a:schemeClr val="dk1"/>
+          </a:effectRef>
+          <a:fontRef idx="minor">
+            <a:schemeClr val="tx1"/>
+          </a:fontRef>
+        </p:style>
+      </p:cxnSp>
     </p:spTree>
     <p:extLst>
       <p:ext uri="{BB962C8B-B14F-4D97-AF65-F5344CB8AC3E}">
